--- a/media/exports/reports/2026-01/calls.pptx
+++ b/media/exports/reports/2026-01/calls.pptx
@@ -235,25 +235,25 @@
                 <c:formatCode>#,##0;[Red](#,##0)</c:formatCode>
                 <c:ptCount val="7"/>
                 <c:pt idx="0">
-                  <c:v>69</c:v>
+                  <c:v>60</c:v>
                 </c:pt>
                 <c:pt idx="1">
-                  <c:v>154</c:v>
+                  <c:v>156</c:v>
                 </c:pt>
                 <c:pt idx="2">
-                  <c:v>135</c:v>
+                  <c:v>132</c:v>
                 </c:pt>
                 <c:pt idx="3">
-                  <c:v>97</c:v>
+                  <c:v>105</c:v>
                 </c:pt>
                 <c:pt idx="4">
-                  <c:v>98</c:v>
+                  <c:v>93</c:v>
                 </c:pt>
                 <c:pt idx="5">
-                  <c:v>89</c:v>
+                  <c:v>78</c:v>
                 </c:pt>
                 <c:pt idx="6">
-                  <c:v>114</c:v>
+                  <c:v>102</c:v>
                 </c:pt>
               </c:numCache>
             </c:numRef>
@@ -317,7 +317,7 @@
       <c:valAx>
         <c:axId val="-2113994440"/>
         <c:scaling>
-          <c:max val="177.1"/>
+          <c:max val="179.39999999999998"/>
           <c:min val="0.0"/>
         </c:scaling>
         <c:delete/>
@@ -459,52 +459,52 @@
                 <c:formatCode>#,##0;[Red](#,##0)</c:formatCode>
                 <c:ptCount val="16"/>
                 <c:pt idx="0">
-                  <c:v>659</c:v>
+                  <c:v>685</c:v>
                 </c:pt>
                 <c:pt idx="1">
-                  <c:v>655</c:v>
+                  <c:v>633</c:v>
                 </c:pt>
                 <c:pt idx="2">
+                  <c:v>684</c:v>
+                </c:pt>
+                <c:pt idx="3">
+                  <c:v>690</c:v>
+                </c:pt>
+                <c:pt idx="4">
+                  <c:v>664</c:v>
+                </c:pt>
+                <c:pt idx="5">
                   <c:v>685</c:v>
                 </c:pt>
-                <c:pt idx="3">
-                  <c:v>714</c:v>
-                </c:pt>
-                <c:pt idx="4">
-                  <c:v>683</c:v>
-                </c:pt>
-                <c:pt idx="5">
-                  <c:v>725</c:v>
-                </c:pt>
                 <c:pt idx="6">
-                  <c:v>620</c:v>
+                  <c:v>629</c:v>
                 </c:pt>
                 <c:pt idx="7">
-                  <c:v>754</c:v>
+                  <c:v>724</c:v>
                 </c:pt>
                 <c:pt idx="8">
-                  <c:v>783</c:v>
+                  <c:v>820</c:v>
                 </c:pt>
                 <c:pt idx="9">
-                  <c:v>871</c:v>
+                  <c:v>909</c:v>
                 </c:pt>
                 <c:pt idx="10">
-                  <c:v>852</c:v>
+                  <c:v>826</c:v>
                 </c:pt>
                 <c:pt idx="11">
-                  <c:v>781</c:v>
+                  <c:v>756</c:v>
                 </c:pt>
                 <c:pt idx="12">
-                  <c:v>792</c:v>
+                  <c:v>770</c:v>
                 </c:pt>
                 <c:pt idx="13">
-                  <c:v>675</c:v>
+                  <c:v>746</c:v>
                 </c:pt>
                 <c:pt idx="14">
-                  <c:v>725</c:v>
+                  <c:v>776</c:v>
                 </c:pt>
                 <c:pt idx="15">
-                  <c:v>756</c:v>
+                  <c:v>726</c:v>
                 </c:pt>
               </c:numCache>
             </c:numRef>
@@ -1078,7 +1078,7 @@
           <a:lstStyle/>
           <a:p>
             <a:r>
-              <a:t>When do calls for help come in, and are we there to answer?. Calls for help, January: 756; Answered while staffed, January: 85.2%; Calls outside staffed hours, January: 50.9%; Median wait when answered, January: 77 sec. 756 calls for help came in during January. While the line was staffed, 85.2% were answered (target 90.0%); 50.9% of all calls came outside staffed hours and went to voicemail. The busiest time was 5 to 8pm (154 calls). 154 calls came between 5 and 8pm, when no-one is on the line. 55 callers hung up waiting while the line was staffed.</a:t>
+              <a:t>When do calls for help come in, and are we there to answer?. Calls for help, January: 726; Answered while staffed, January: 85.8%; Calls outside staffed hours, January: 52.3%; Median wait when answered, January: 77 sec. 726 calls for help came in during January. While the line was staffed, 85.8% were answered (target 90.0%); 52.3% of all calls came outside staffed hours and went to voicemail. The busiest time was 5 to 8pm (156 calls). 156 calls came between 5 and 8pm, when no-one is on the line. 49 callers hung up waiting while the line was staffed.</a:t>
             </a:r>
           </a:p>
         </p:txBody>
@@ -4563,7 +4563,7 @@
                 </a:solidFill>
                 <a:latin typeface="Roboto"/>
               </a:rPr>
-              <a:t>Data retrieved 2pm, Tue 6 Oct 2026 · Generated 8 Oct 2026, 6:42pm · Sample data · Made with Python (python-pptx)</a:t>
+              <a:t>Data retrieved 2pm, Tue 6 Oct 2026 · Generated 8 Oct 2026, 11:41pm · Sample data · Made with Python (python-pptx)</a:t>
             </a:r>
           </a:p>
         </p:txBody>
@@ -4909,7 +4909,7 @@
                 </a:solidFill>
                 <a:latin typeface="Roboto"/>
               </a:rPr>
-              <a:t>756</a:t>
+              <a:t>726</a:t>
             </a:r>
           </a:p>
         </p:txBody>
@@ -4948,7 +4948,7 @@
                 </a:solidFill>
                 <a:latin typeface="Roboto"/>
               </a:rPr>
-              <a:t>December 725</a:t>
+              <a:t>December 776</a:t>
             </a:r>
           </a:p>
         </p:txBody>
@@ -5075,7 +5075,7 @@
                 </a:solidFill>
                 <a:latin typeface="Roboto"/>
               </a:rPr>
-              <a:t>85.2%</a:t>
+              <a:t>85.8%</a:t>
             </a:r>
           </a:p>
         </p:txBody>
@@ -5241,7 +5241,7 @@
                 </a:solidFill>
                 <a:latin typeface="Roboto"/>
               </a:rPr>
-              <a:t>50.9%</a:t>
+              <a:t>52.3%</a:t>
             </a:r>
           </a:p>
         </p:txBody>
@@ -5280,7 +5280,7 @@
                 </a:solidFill>
                 <a:latin typeface="Roboto"/>
               </a:rPr>
-              <a:t>385 calls to voicemail</a:t>
+              <a:t>380 calls to voicemail</a:t>
             </a:r>
           </a:p>
         </p:txBody>
@@ -5446,7 +5446,7 @@
                 </a:solidFill>
                 <a:latin typeface="Roboto"/>
               </a:rPr>
-              <a:t>316 answered calls</a:t>
+              <a:t>297 answered calls</a:t>
             </a:r>
           </a:p>
         </p:txBody>
@@ -5591,7 +5591,7 @@
                 </a:solidFill>
                 <a:latin typeface="Roboto"/>
               </a:rPr>
-              <a:t>756 calls for help came in during January. While the line was staffed, 85.2% were answered (target 90.0%); 50.9% of all calls came outside staffed hours and went to voicemail. The busiest time was 5 to 8pm (154 calls).</a:t>
+              <a:t>726 calls for help came in during January. While the line was staffed, 85.8% were answered (target 90.0%); 52.3% of all calls came outside staffed hours and went to voicemail. The busiest time was 5 to 8pm (156 calls).</a:t>
             </a:r>
           </a:p>
         </p:txBody>
@@ -5718,7 +5718,7 @@
                 </a:solidFill>
                 <a:latin typeface="Roboto"/>
               </a:rPr>
-              <a:t>154 calls came between 5 and 8pm, when no-one is on the line. 55 callers hung up waiting while the line was staffed.</a:t>
+              <a:t>156 calls came between 5 and 8pm, when no-one is on the line. 49 callers hung up waiting while the line was staffed.</a:t>
             </a:r>
           </a:p>
         </p:txBody>
@@ -5796,7 +5796,7 @@
                 </a:solidFill>
                 <a:latin typeface="Roboto"/>
               </a:rPr>
-              <a:t>Data retrieved 2pm, Tue 6 Oct 2026 · Generated 8 Oct 2026, 6:42pm · Sample data · Made with Python (python-pptx)</a:t>
+              <a:t>Data retrieved 2pm, Tue 6 Oct 2026 · Generated 8 Oct 2026, 11:41pm · Sample data · Made with Python (python-pptx)</a:t>
             </a:r>
           </a:p>
         </p:txBody>
@@ -6111,7 +6111,7 @@
                 </a:solidFill>
                 <a:latin typeface="Roboto"/>
               </a:rPr>
-              <a:t>Data retrieved 2pm, Tue 6 Oct 2026 · Generated 8 Oct 2026, 6:42pm · Sample data · Made with Python (python-pptx)</a:t>
+              <a:t>Data retrieved 2pm, Tue 6 Oct 2026 · Generated 8 Oct 2026, 11:41pm · Sample data · Made with Python (python-pptx)</a:t>
             </a:r>
           </a:p>
         </p:txBody>

--- a/media/exports/reports/2026-01/calls.pptx
+++ b/media/exports/reports/2026-01/calls.pptx
@@ -1008,7 +1008,7 @@
           <a:lstStyle/>
           <a:p>
             <a:r>
-              <a:t>When do calls for help come in, and are we there to answer?. Sample Community Services Ltd. Period: January 2026. Every call to the help line: when it came in, whether someone answered, and how long the caller waited. The line is staffed 8:30am to 5pm on working days.</a:t>
+              <a:t>When do calls for help come in, and are we there to answer?. Sample Community Services Ltd. Period: January 2026. In short: 726 calls in January: 85.8% answered while staffed (target 90.0%); 52.3% came outside staffed hours. Every call to the help line: when it came in, whether someone answered, and how long the caller waited. The line is staffed 8:30am to 5pm on working days.</a:t>
             </a:r>
           </a:p>
         </p:txBody>
@@ -4373,7 +4373,7 @@
         <p:spPr>
           <a:xfrm>
             <a:off x="457200" y="3703320"/>
-            <a:ext cx="11277295" cy="535940"/>
+            <a:ext cx="11277295" cy="758190"/>
           </a:xfrm>
           <a:prstGeom prst="rect">
             <a:avLst/>
@@ -4398,7 +4398,7 @@
                 </a:solidFill>
                 <a:latin typeface="Roboto"/>
               </a:rPr>
-              <a:t>Period: January 2026. Every call to the help line: when it came in, whether someone answered, and how long the caller waited. The line is staffed 8:30am to 5pm on working days.</a:t>
+              <a:t>Period: January 2026. In short: 726 calls in January: 85.8% answered while staffed (target 90.0%); 52.3% came outside staffed hours. Every call to the help line: when it came in, whether someone answered, and how long the caller waited. The line is staffed 8:30am to 5pm on working days.</a:t>
             </a:r>
           </a:p>
         </p:txBody>
@@ -4411,7 +4411,7 @@
         </p:nvSpPr>
         <p:spPr>
           <a:xfrm>
-            <a:off x="457200" y="4330700"/>
+            <a:off x="457200" y="4552950"/>
             <a:ext cx="11277295" cy="1097280"/>
           </a:xfrm>
           <a:prstGeom prst="rect">
@@ -4563,7 +4563,7 @@
                 </a:solidFill>
                 <a:latin typeface="Roboto"/>
               </a:rPr>
-              <a:t>Data retrieved 2pm, Tue 6 Oct 2026 · Generated 8 Oct 2026, 11:41pm · Sample data · Made with Python (python-pptx)</a:t>
+              <a:t>Data retrieved 2pm, Tue 6 Oct 2026 · Generated 10 Oct 2026, 9:55pm · Sample data · Made with Python (python-pptx)</a:t>
             </a:r>
           </a:p>
         </p:txBody>
@@ -5796,7 +5796,7 @@
                 </a:solidFill>
                 <a:latin typeface="Roboto"/>
               </a:rPr>
-              <a:t>Data retrieved 2pm, Tue 6 Oct 2026 · Generated 8 Oct 2026, 11:41pm · Sample data · Made with Python (python-pptx)</a:t>
+              <a:t>Data retrieved 2pm, Tue 6 Oct 2026 · Generated 10 Oct 2026, 9:55pm · Sample data · Made with Python (python-pptx)</a:t>
             </a:r>
           </a:p>
         </p:txBody>
@@ -6111,7 +6111,7 @@
                 </a:solidFill>
                 <a:latin typeface="Roboto"/>
               </a:rPr>
-              <a:t>Data retrieved 2pm, Tue 6 Oct 2026 · Generated 8 Oct 2026, 11:41pm · Sample data · Made with Python (python-pptx)</a:t>
+              <a:t>Data retrieved 2pm, Tue 6 Oct 2026 · Generated 10 Oct 2026, 9:55pm · Sample data · Made with Python (python-pptx)</a:t>
             </a:r>
           </a:p>
         </p:txBody>
